--- a/infrastructure.pptx
+++ b/infrastructure.pptx
@@ -3221,7 +3221,7 @@
                 </a:solidFill>
                 <a:latin typeface="IBM Plex Mono"/>
               </a:rPr>
-              <a:t>JC ADVISORY · HEALTH PLATFORM</a:t>
+              <a:t>LUMEN HEALTH · ENGINEERING DOCS</a:t>
             </a:r>
           </a:p>
         </p:txBody>
@@ -10309,7 +10309,7 @@
                 </a:solidFill>
                 <a:latin typeface="IBM Plex Mono"/>
               </a:rPr>
-              <a:t>JC Advisory · Health Platform · Infrastructure</a:t>
+              <a:t>Lumen Health · Infrastructure</a:t>
             </a:r>
           </a:p>
         </p:txBody>
@@ -13739,7 +13739,7 @@
                 </a:solidFill>
                 <a:latin typeface="IBM Plex Mono"/>
               </a:rPr>
-              <a:t>JC Advisory · Health Platform · Infrastructure</a:t>
+              <a:t>Lumen Health · Infrastructure</a:t>
             </a:r>
           </a:p>
         </p:txBody>
@@ -16251,7 +16251,7 @@
                 </a:solidFill>
                 <a:latin typeface="IBM Plex Mono"/>
               </a:rPr>
-              <a:t>JC Advisory · Health Platform · Infrastructure</a:t>
+              <a:t>Lumen Health · Infrastructure</a:t>
             </a:r>
           </a:p>
         </p:txBody>
